--- a/neerlandais1/powerpoints/Module_20_Van_wie_is_dit.pptx
+++ b/neerlandais1/powerpoints/Module_20_Van_wie_is_dit.pptx
@@ -133,18 +133,18 @@
   <p:extLst>
     <p:ext uri="{521415D9-36F7-43E2-AB2F-B90AF26B5E84}">
       <p14:sectionLst xmlns:p14="http://schemas.microsoft.com/office/powerpoint/2010/main">
-        <p14:section name="Ouverture" id="{07c9d394-eb8a-ef7b-3320-b2f5e2d64b91}">
+        <p14:section name="Ouverture" id="{d5e012a4-f346-c465-40d6-92dc31643ff0}">
           <p14:sldIdLst>
             <p14:sldId id="256"/>
           </p14:sldIdLst>
         </p14:section>
-        <p14:section name="Découvrir" id="{88b4c955-672c-9a24-f016-ff0fdef63194}">
+        <p14:section name="Découvrir" id="{9ddb7ab4-9922-c84e-4bd0-732efd4e4d82}">
           <p14:sldIdLst>
             <p14:sldId id="257"/>
             <p14:sldId id="258"/>
           </p14:sldIdLst>
         </p14:section>
-        <p14:section name="Comprendre" id="{698491de-0c98-96bb-0782-96713ee7dcfc}">
+        <p14:section name="Comprendre" id="{bf5fe17d-446a-244a-899b-869e7277db71}">
           <p14:sldIdLst>
             <p14:sldId id="259"/>
             <p14:sldId id="260"/>
@@ -158,7 +158,7 @@
             <p14:sldId id="268"/>
           </p14:sldIdLst>
         </p14:section>
-        <p14:section name="JIJ NU ! — Oefeningen" id="{aca33812-cfdf-2cdb-60c6-8dffde119782}">
+        <p14:section name="JIJ NU ! — Oefeningen" id="{52de6a8f-39ff-cf1e-15f3-752c1bb231f4}">
           <p14:sldIdLst>
             <p14:sldId id="269"/>
             <p14:sldId id="270"/>
@@ -175,7 +175,7 @@
             <p14:sldId id="281"/>
           </p14:sldIdLst>
         </p14:section>
-        <p14:section name="Clôture" id="{ca636f17-5395-f2bf-eb07-6255ab50dec8}">
+        <p14:section name="Clôture" id="{289be5b6-afcf-a3e5-761f-170bcb89b19d}">
           <p14:sldIdLst>
             <p14:sldId id="282"/>
           </p14:sldIdLst>
@@ -3806,7 +3806,7 @@
                   <a:srgbClr val="FFFFFF"/>
                 </a:solidFill>
               </a:rPr>
-              <a:t>MODULE 20 / 24</a:t>
+              <a:t>MODULE 20 / 29</a:t>
             </a:r>
             <a:endParaRPr lang="en-US" sz="1400" dirty="0"/>
           </a:p>

--- a/neerlandais1/powerpoints/Module_20_Van_wie_is_dit.pptx
+++ b/neerlandais1/powerpoints/Module_20_Van_wie_is_dit.pptx
@@ -133,18 +133,18 @@
   <p:extLst>
     <p:ext uri="{521415D9-36F7-43E2-AB2F-B90AF26B5E84}">
       <p14:sectionLst xmlns:p14="http://schemas.microsoft.com/office/powerpoint/2010/main">
-        <p14:section name="Ouverture" id="{d5e012a4-f346-c465-40d6-92dc31643ff0}">
+        <p14:section name="Ouverture" id="{be2c599e-0303-323a-5313-5633a78f0931}">
           <p14:sldIdLst>
             <p14:sldId id="256"/>
           </p14:sldIdLst>
         </p14:section>
-        <p14:section name="Découvrir" id="{9ddb7ab4-9922-c84e-4bd0-732efd4e4d82}">
+        <p14:section name="Découvrir" id="{4e63dd44-ce20-95ae-82c2-cd9077ada3cb}">
           <p14:sldIdLst>
             <p14:sldId id="257"/>
             <p14:sldId id="258"/>
           </p14:sldIdLst>
         </p14:section>
-        <p14:section name="Comprendre" id="{bf5fe17d-446a-244a-899b-869e7277db71}">
+        <p14:section name="Comprendre" id="{74938bc4-b8e6-10c3-48e8-51d1db25ad6a}">
           <p14:sldIdLst>
             <p14:sldId id="259"/>
             <p14:sldId id="260"/>
@@ -158,7 +158,7 @@
             <p14:sldId id="268"/>
           </p14:sldIdLst>
         </p14:section>
-        <p14:section name="JIJ NU ! — Oefeningen" id="{52de6a8f-39ff-cf1e-15f3-752c1bb231f4}">
+        <p14:section name="JIJ NU ! — Oefeningen" id="{02c2f8ba-f803-de25-de7f-a459dd5685ba}">
           <p14:sldIdLst>
             <p14:sldId id="269"/>
             <p14:sldId id="270"/>
@@ -175,7 +175,7 @@
             <p14:sldId id="281"/>
           </p14:sldIdLst>
         </p14:section>
-        <p14:section name="Clôture" id="{289be5b6-afcf-a3e5-761f-170bcb89b19d}">
+        <p14:section name="Clôture" id="{54051b4f-85c9-194b-de42-25528facab89}">
           <p14:sldIdLst>
             <p14:sldId id="282"/>
           </p14:sldIdLst>
@@ -3806,7 +3806,7 @@
                   <a:srgbClr val="FFFFFF"/>
                 </a:solidFill>
               </a:rPr>
-              <a:t>MODULE 20 / 29</a:t>
+              <a:t>MODULE 20 / 32</a:t>
             </a:r>
             <a:endParaRPr lang="en-US" sz="1400" dirty="0"/>
           </a:p>

--- a/neerlandais1/powerpoints/Module_20_Van_wie_is_dit.pptx
+++ b/neerlandais1/powerpoints/Module_20_Van_wie_is_dit.pptx
@@ -133,18 +133,18 @@
   <p:extLst>
     <p:ext uri="{521415D9-36F7-43E2-AB2F-B90AF26B5E84}">
       <p14:sectionLst xmlns:p14="http://schemas.microsoft.com/office/powerpoint/2010/main">
-        <p14:section name="Ouverture" id="{be2c599e-0303-323a-5313-5633a78f0931}">
+        <p14:section name="Ouverture" id="{153efba8-7421-3b69-f006-66c965cb916b}">
           <p14:sldIdLst>
             <p14:sldId id="256"/>
           </p14:sldIdLst>
         </p14:section>
-        <p14:section name="Découvrir" id="{4e63dd44-ce20-95ae-82c2-cd9077ada3cb}">
+        <p14:section name="Découvrir" id="{14660279-388a-197d-2dee-a491d41d34df}">
           <p14:sldIdLst>
             <p14:sldId id="257"/>
             <p14:sldId id="258"/>
           </p14:sldIdLst>
         </p14:section>
-        <p14:section name="Comprendre" id="{74938bc4-b8e6-10c3-48e8-51d1db25ad6a}">
+        <p14:section name="Comprendre" id="{649667df-170f-dbc7-b0e1-41cc18bb7942}">
           <p14:sldIdLst>
             <p14:sldId id="259"/>
             <p14:sldId id="260"/>
@@ -158,7 +158,7 @@
             <p14:sldId id="268"/>
           </p14:sldIdLst>
         </p14:section>
-        <p14:section name="JIJ NU ! — Oefeningen" id="{02c2f8ba-f803-de25-de7f-a459dd5685ba}">
+        <p14:section name="JIJ NU ! — Oefeningen" id="{d91fc59c-d29e-0ebd-6269-6ce928d65a32}">
           <p14:sldIdLst>
             <p14:sldId id="269"/>
             <p14:sldId id="270"/>
@@ -175,7 +175,7 @@
             <p14:sldId id="281"/>
           </p14:sldIdLst>
         </p14:section>
-        <p14:section name="Clôture" id="{54051b4f-85c9-194b-de42-25528facab89}">
+        <p14:section name="Clôture" id="{23968496-bc55-1cfc-726a-b8fcd00ad7ce}">
           <p14:sldIdLst>
             <p14:sldId id="282"/>
           </p14:sldIdLst>

--- a/neerlandais1/powerpoints/Module_20_Van_wie_is_dit.pptx
+++ b/neerlandais1/powerpoints/Module_20_Van_wie_is_dit.pptx
@@ -133,18 +133,18 @@
   <p:extLst>
     <p:ext uri="{521415D9-36F7-43E2-AB2F-B90AF26B5E84}">
       <p14:sectionLst xmlns:p14="http://schemas.microsoft.com/office/powerpoint/2010/main">
-        <p14:section name="Ouverture" id="{153efba8-7421-3b69-f006-66c965cb916b}">
+        <p14:section name="Ouverture" id="{3c463c00-1f64-989a-732c-591be824c967}">
           <p14:sldIdLst>
             <p14:sldId id="256"/>
           </p14:sldIdLst>
         </p14:section>
-        <p14:section name="Découvrir" id="{14660279-388a-197d-2dee-a491d41d34df}">
+        <p14:section name="Découvrir" id="{a20e076a-3085-89a4-c374-af33d585eccb}">
           <p14:sldIdLst>
             <p14:sldId id="257"/>
             <p14:sldId id="258"/>
           </p14:sldIdLst>
         </p14:section>
-        <p14:section name="Comprendre" id="{649667df-170f-dbc7-b0e1-41cc18bb7942}">
+        <p14:section name="Comprendre" id="{1bf62e0d-17e6-1811-3253-a1f74116c578}">
           <p14:sldIdLst>
             <p14:sldId id="259"/>
             <p14:sldId id="260"/>
@@ -158,7 +158,7 @@
             <p14:sldId id="268"/>
           </p14:sldIdLst>
         </p14:section>
-        <p14:section name="JIJ NU ! — Oefeningen" id="{d91fc59c-d29e-0ebd-6269-6ce928d65a32}">
+        <p14:section name="JIJ NU ! — Oefeningen" id="{ffa19a48-d4b9-8fce-cdad-82f21fb191b6}">
           <p14:sldIdLst>
             <p14:sldId id="269"/>
             <p14:sldId id="270"/>
@@ -175,7 +175,7 @@
             <p14:sldId id="281"/>
           </p14:sldIdLst>
         </p14:section>
-        <p14:section name="Clôture" id="{23968496-bc55-1cfc-726a-b8fcd00ad7ce}">
+        <p14:section name="Clôture" id="{ec53f738-4381-17a3-181f-1f1b1cb27520}">
           <p14:sldIdLst>
             <p14:sldId id="282"/>
           </p14:sldIdLst>

--- a/neerlandais1/powerpoints/Module_20_Van_wie_is_dit.pptx
+++ b/neerlandais1/powerpoints/Module_20_Van_wie_is_dit.pptx
@@ -133,18 +133,18 @@
   <p:extLst>
     <p:ext uri="{521415D9-36F7-43E2-AB2F-B90AF26B5E84}">
       <p14:sectionLst xmlns:p14="http://schemas.microsoft.com/office/powerpoint/2010/main">
-        <p14:section name="Ouverture" id="{3c463c00-1f64-989a-732c-591be824c967}">
+        <p14:section name="Ouverture" id="{6e9a7341-6e3d-4d5c-52ec-d65c9caaff21}">
           <p14:sldIdLst>
             <p14:sldId id="256"/>
           </p14:sldIdLst>
         </p14:section>
-        <p14:section name="Découvrir" id="{a20e076a-3085-89a4-c374-af33d585eccb}">
+        <p14:section name="Découvrir" id="{47bd2fb2-e123-4e83-657d-85546a7b5cdb}">
           <p14:sldIdLst>
             <p14:sldId id="257"/>
             <p14:sldId id="258"/>
           </p14:sldIdLst>
         </p14:section>
-        <p14:section name="Comprendre" id="{1bf62e0d-17e6-1811-3253-a1f74116c578}">
+        <p14:section name="Comprendre" id="{4d1d8f68-3c7f-6a41-fbcc-c893e168ecd6}">
           <p14:sldIdLst>
             <p14:sldId id="259"/>
             <p14:sldId id="260"/>
@@ -158,7 +158,7 @@
             <p14:sldId id="268"/>
           </p14:sldIdLst>
         </p14:section>
-        <p14:section name="JIJ NU ! — Oefeningen" id="{ffa19a48-d4b9-8fce-cdad-82f21fb191b6}">
+        <p14:section name="JIJ NU ! — Oefeningen" id="{48faeaa7-0658-28df-f2a8-e37ca935946c}">
           <p14:sldIdLst>
             <p14:sldId id="269"/>
             <p14:sldId id="270"/>
@@ -175,7 +175,7 @@
             <p14:sldId id="281"/>
           </p14:sldIdLst>
         </p14:section>
-        <p14:section name="Clôture" id="{ec53f738-4381-17a3-181f-1f1b1cb27520}">
+        <p14:section name="Clôture" id="{61a9a0d2-1e15-0a97-51ea-2d4a6685e7ef}">
           <p14:sldIdLst>
             <p14:sldId id="282"/>
           </p14:sldIdLst>

--- a/neerlandais1/powerpoints/Module_20_Van_wie_is_dit.pptx
+++ b/neerlandais1/powerpoints/Module_20_Van_wie_is_dit.pptx
@@ -133,18 +133,18 @@
   <p:extLst>
     <p:ext uri="{521415D9-36F7-43E2-AB2F-B90AF26B5E84}">
       <p14:sectionLst xmlns:p14="http://schemas.microsoft.com/office/powerpoint/2010/main">
-        <p14:section name="Ouverture" id="{6e9a7341-6e3d-4d5c-52ec-d65c9caaff21}">
+        <p14:section name="Ouverture" id="{0b06c4ab-c836-0220-024e-ee048dbc7033}">
           <p14:sldIdLst>
             <p14:sldId id="256"/>
           </p14:sldIdLst>
         </p14:section>
-        <p14:section name="Découvrir" id="{47bd2fb2-e123-4e83-657d-85546a7b5cdb}">
+        <p14:section name="Découvrir" id="{e63a5ca7-4438-2a18-784b-258fc77c9fe1}">
           <p14:sldIdLst>
             <p14:sldId id="257"/>
             <p14:sldId id="258"/>
           </p14:sldIdLst>
         </p14:section>
-        <p14:section name="Comprendre" id="{4d1d8f68-3c7f-6a41-fbcc-c893e168ecd6}">
+        <p14:section name="Comprendre" id="{d0caa03e-07e1-0198-054a-797796923308}">
           <p14:sldIdLst>
             <p14:sldId id="259"/>
             <p14:sldId id="260"/>
@@ -158,7 +158,7 @@
             <p14:sldId id="268"/>
           </p14:sldIdLst>
         </p14:section>
-        <p14:section name="JIJ NU ! — Oefeningen" id="{48faeaa7-0658-28df-f2a8-e37ca935946c}">
+        <p14:section name="JIJ NU ! — Oefeningen" id="{76a7aa71-2715-f4f6-878e-8f697363672f}">
           <p14:sldIdLst>
             <p14:sldId id="269"/>
             <p14:sldId id="270"/>
@@ -175,7 +175,7 @@
             <p14:sldId id="281"/>
           </p14:sldIdLst>
         </p14:section>
-        <p14:section name="Clôture" id="{61a9a0d2-1e15-0a97-51ea-2d4a6685e7ef}">
+        <p14:section name="Clôture" id="{e3440e11-27df-e859-e171-eb15527f1411}">
           <p14:sldIdLst>
             <p14:sldId id="282"/>
           </p14:sldIdLst>

--- a/neerlandais1/powerpoints/Module_20_Van_wie_is_dit.pptx
+++ b/neerlandais1/powerpoints/Module_20_Van_wie_is_dit.pptx
@@ -133,18 +133,18 @@
   <p:extLst>
     <p:ext uri="{521415D9-36F7-43E2-AB2F-B90AF26B5E84}">
       <p14:sectionLst xmlns:p14="http://schemas.microsoft.com/office/powerpoint/2010/main">
-        <p14:section name="Ouverture" id="{0b06c4ab-c836-0220-024e-ee048dbc7033}">
+        <p14:section name="Ouverture" id="{7131a1d5-f615-f0b2-5547-65618c456a25}">
           <p14:sldIdLst>
             <p14:sldId id="256"/>
           </p14:sldIdLst>
         </p14:section>
-        <p14:section name="Découvrir" id="{e63a5ca7-4438-2a18-784b-258fc77c9fe1}">
+        <p14:section name="Découvrir" id="{cad95201-e2cd-6d63-cec8-d5498ceab39c}">
           <p14:sldIdLst>
             <p14:sldId id="257"/>
             <p14:sldId id="258"/>
           </p14:sldIdLst>
         </p14:section>
-        <p14:section name="Comprendre" id="{d0caa03e-07e1-0198-054a-797796923308}">
+        <p14:section name="Comprendre" id="{a9347dd3-c8a8-9622-d988-2261d550e4ec}">
           <p14:sldIdLst>
             <p14:sldId id="259"/>
             <p14:sldId id="260"/>
@@ -158,7 +158,7 @@
             <p14:sldId id="268"/>
           </p14:sldIdLst>
         </p14:section>
-        <p14:section name="JIJ NU ! — Oefeningen" id="{76a7aa71-2715-f4f6-878e-8f697363672f}">
+        <p14:section name="JIJ NU ! — Oefeningen" id="{fa3abdba-99c4-5963-6fb9-e98b1b1d93c2}">
           <p14:sldIdLst>
             <p14:sldId id="269"/>
             <p14:sldId id="270"/>
@@ -175,7 +175,7 @@
             <p14:sldId id="281"/>
           </p14:sldIdLst>
         </p14:section>
-        <p14:section name="Clôture" id="{e3440e11-27df-e859-e171-eb15527f1411}">
+        <p14:section name="Clôture" id="{14afe949-7a74-94ed-4db4-642b46938633}">
           <p14:sldIdLst>
             <p14:sldId id="282"/>
           </p14:sldIdLst>

--- a/neerlandais1/powerpoints/Module_20_Van_wie_is_dit.pptx
+++ b/neerlandais1/powerpoints/Module_20_Van_wie_is_dit.pptx
@@ -133,18 +133,18 @@
   <p:extLst>
     <p:ext uri="{521415D9-36F7-43E2-AB2F-B90AF26B5E84}">
       <p14:sectionLst xmlns:p14="http://schemas.microsoft.com/office/powerpoint/2010/main">
-        <p14:section name="Ouverture" id="{7131a1d5-f615-f0b2-5547-65618c456a25}">
+        <p14:section name="Ouverture" id="{06b85093-f268-aba0-e5f8-132c7bd15da3}">
           <p14:sldIdLst>
             <p14:sldId id="256"/>
           </p14:sldIdLst>
         </p14:section>
-        <p14:section name="Découvrir" id="{cad95201-e2cd-6d63-cec8-d5498ceab39c}">
+        <p14:section name="Découvrir" id="{8976d935-dc05-e751-70e0-2bf2c148bfb0}">
           <p14:sldIdLst>
             <p14:sldId id="257"/>
             <p14:sldId id="258"/>
           </p14:sldIdLst>
         </p14:section>
-        <p14:section name="Comprendre" id="{a9347dd3-c8a8-9622-d988-2261d550e4ec}">
+        <p14:section name="Comprendre" id="{135b7234-21a7-24f7-1973-0774f39f4f67}">
           <p14:sldIdLst>
             <p14:sldId id="259"/>
             <p14:sldId id="260"/>
@@ -158,7 +158,7 @@
             <p14:sldId id="268"/>
           </p14:sldIdLst>
         </p14:section>
-        <p14:section name="JIJ NU ! — Oefeningen" id="{fa3abdba-99c4-5963-6fb9-e98b1b1d93c2}">
+        <p14:section name="JIJ NU ! — Oefeningen" id="{7688ef0e-f689-d2a0-2d44-9c5aff2e2a57}">
           <p14:sldIdLst>
             <p14:sldId id="269"/>
             <p14:sldId id="270"/>
@@ -175,7 +175,7 @@
             <p14:sldId id="281"/>
           </p14:sldIdLst>
         </p14:section>
-        <p14:section name="Clôture" id="{14afe949-7a74-94ed-4db4-642b46938633}">
+        <p14:section name="Clôture" id="{05c0f02c-5eed-7ab7-0ba4-ab7e40df40f4}">
           <p14:sldIdLst>
             <p14:sldId id="282"/>
           </p14:sldIdLst>

--- a/neerlandais1/powerpoints/Module_20_Van_wie_is_dit.pptx
+++ b/neerlandais1/powerpoints/Module_20_Van_wie_is_dit.pptx
@@ -133,18 +133,18 @@
   <p:extLst>
     <p:ext uri="{521415D9-36F7-43E2-AB2F-B90AF26B5E84}">
       <p14:sectionLst xmlns:p14="http://schemas.microsoft.com/office/powerpoint/2010/main">
-        <p14:section name="Ouverture" id="{06b85093-f268-aba0-e5f8-132c7bd15da3}">
+        <p14:section name="Ouverture" id="{09a6be50-7349-e943-91d9-9a27a1294464}">
           <p14:sldIdLst>
             <p14:sldId id="256"/>
           </p14:sldIdLst>
         </p14:section>
-        <p14:section name="Découvrir" id="{8976d935-dc05-e751-70e0-2bf2c148bfb0}">
+        <p14:section name="Découvrir" id="{5d93e514-bab5-3a39-71a6-0f6695fc1a97}">
           <p14:sldIdLst>
             <p14:sldId id="257"/>
             <p14:sldId id="258"/>
           </p14:sldIdLst>
         </p14:section>
-        <p14:section name="Comprendre" id="{135b7234-21a7-24f7-1973-0774f39f4f67}">
+        <p14:section name="Comprendre" id="{96cef28b-ecc8-aaa2-3883-25c05de38505}">
           <p14:sldIdLst>
             <p14:sldId id="259"/>
             <p14:sldId id="260"/>
@@ -158,7 +158,7 @@
             <p14:sldId id="268"/>
           </p14:sldIdLst>
         </p14:section>
-        <p14:section name="JIJ NU ! — Oefeningen" id="{7688ef0e-f689-d2a0-2d44-9c5aff2e2a57}">
+        <p14:section name="JIJ NU ! — Oefeningen" id="{c8ab580b-c533-108e-3d40-2d658f0f2b86}">
           <p14:sldIdLst>
             <p14:sldId id="269"/>
             <p14:sldId id="270"/>
@@ -175,7 +175,7 @@
             <p14:sldId id="281"/>
           </p14:sldIdLst>
         </p14:section>
-        <p14:section name="Clôture" id="{05c0f02c-5eed-7ab7-0ba4-ab7e40df40f4}">
+        <p14:section name="Clôture" id="{809663eb-b87e-3a62-3d8a-554905c43375}">
           <p14:sldIdLst>
             <p14:sldId id="282"/>
           </p14:sldIdLst>

--- a/neerlandais1/powerpoints/Module_20_Van_wie_is_dit.pptx
+++ b/neerlandais1/powerpoints/Module_20_Van_wie_is_dit.pptx
@@ -133,18 +133,18 @@
   <p:extLst>
     <p:ext uri="{521415D9-36F7-43E2-AB2F-B90AF26B5E84}">
       <p14:sectionLst xmlns:p14="http://schemas.microsoft.com/office/powerpoint/2010/main">
-        <p14:section name="Ouverture" id="{09a6be50-7349-e943-91d9-9a27a1294464}">
+        <p14:section name="Ouverture" id="{b9895d03-c811-2f52-9808-1522d261965a}">
           <p14:sldIdLst>
             <p14:sldId id="256"/>
           </p14:sldIdLst>
         </p14:section>
-        <p14:section name="Découvrir" id="{5d93e514-bab5-3a39-71a6-0f6695fc1a97}">
+        <p14:section name="Découvrir" id="{8cd6be49-1302-d10e-ae4f-180213185e0b}">
           <p14:sldIdLst>
             <p14:sldId id="257"/>
             <p14:sldId id="258"/>
           </p14:sldIdLst>
         </p14:section>
-        <p14:section name="Comprendre" id="{96cef28b-ecc8-aaa2-3883-25c05de38505}">
+        <p14:section name="Comprendre" id="{f4e48633-196e-613d-2836-5aa6c4c4e21e}">
           <p14:sldIdLst>
             <p14:sldId id="259"/>
             <p14:sldId id="260"/>
@@ -158,7 +158,7 @@
             <p14:sldId id="268"/>
           </p14:sldIdLst>
         </p14:section>
-        <p14:section name="JIJ NU ! — Oefeningen" id="{c8ab580b-c533-108e-3d40-2d658f0f2b86}">
+        <p14:section name="JIJ NU ! — Oefeningen" id="{1a389569-d86a-a2bb-7709-fe52b995fd87}">
           <p14:sldIdLst>
             <p14:sldId id="269"/>
             <p14:sldId id="270"/>
@@ -175,7 +175,7 @@
             <p14:sldId id="281"/>
           </p14:sldIdLst>
         </p14:section>
-        <p14:section name="Clôture" id="{809663eb-b87e-3a62-3d8a-554905c43375}">
+        <p14:section name="Clôture" id="{962a2a97-8330-2951-b2d7-ed68b2028e82}">
           <p14:sldIdLst>
             <p14:sldId id="282"/>
           </p14:sldIdLst>
